--- a/chapter_sync/outputs/2025-07-02_Presentation.pptx
+++ b/chapter_sync/outputs/2025-07-02_Presentation.pptx
@@ -13858,8 +13858,32 @@
         </p:blipFill>
         <p:spPr>
           <a:xfrm>
-            <a:off x="1828800" y="911265"/>
-            <a:ext cx="8534400" cy="5035469"/>
+            <a:off x="3333750" y="182880"/>
+            <a:ext cx="5524500" cy="3259567"/>
+          </a:xfrm>
+          <a:prstGeom prst="rect">
+            <a:avLst/>
+          </a:prstGeom>
+        </p:spPr>
+      </p:pic>
+      <p:pic>
+        <p:nvPicPr>
+          <p:cNvPr id="118" name="Picture 117" descr="image.png"/>
+          <p:cNvPicPr>
+            <a:picLocks noChangeAspect="1"/>
+          </p:cNvPicPr>
+          <p:nvPr/>
+        </p:nvPicPr>
+        <p:blipFill>
+          <a:blip r:embed="rId4"/>
+          <a:stretch>
+            <a:fillRect/>
+          </a:stretch>
+        </p:blipFill>
+        <p:spPr>
+          <a:xfrm>
+            <a:off x="3333750" y="3488167"/>
+            <a:ext cx="5524500" cy="3250799"/>
           </a:xfrm>
           <a:prstGeom prst="rect">
             <a:avLst/>

--- a/chapter_sync/outputs/2025-07-02_Presentation.pptx
+++ b/chapter_sync/outputs/2025-07-02_Presentation.pptx
@@ -13755,8 +13755,8 @@
         </p:blipFill>
         <p:spPr>
           <a:xfrm>
-            <a:off x="1828800" y="1612949"/>
-            <a:ext cx="8534400" cy="3632101"/>
+            <a:off x="1828800" y="1603181"/>
+            <a:ext cx="8534400" cy="3651638"/>
           </a:xfrm>
           <a:prstGeom prst="rect">
             <a:avLst/>
@@ -13859,7 +13859,7 @@
         <p:spPr>
           <a:xfrm>
             <a:off x="3333750" y="182880"/>
-            <a:ext cx="5524500" cy="3259567"/>
+            <a:ext cx="5524500" cy="3257370"/>
           </a:xfrm>
           <a:prstGeom prst="rect">
             <a:avLst/>
@@ -13882,7 +13882,7 @@
         </p:blipFill>
         <p:spPr>
           <a:xfrm>
-            <a:off x="3333750" y="3488167"/>
+            <a:off x="3333750" y="3485970"/>
             <a:ext cx="5524500" cy="3250799"/>
           </a:xfrm>
           <a:prstGeom prst="rect">
@@ -13978,7 +13978,7 @@
         <p:spPr>
           <a:xfrm>
             <a:off x="3333750" y="914400"/>
-            <a:ext cx="5524500" cy="2461272"/>
+            <a:ext cx="5524500" cy="2434007"/>
           </a:xfrm>
           <a:prstGeom prst="rect">
             <a:avLst/>
@@ -14001,8 +14001,8 @@
         </p:blipFill>
         <p:spPr>
           <a:xfrm>
-            <a:off x="3333750" y="3604272"/>
-            <a:ext cx="5524500" cy="2452530"/>
+            <a:off x="3333750" y="3577007"/>
+            <a:ext cx="5524500" cy="2420600"/>
           </a:xfrm>
           <a:prstGeom prst="rect">
             <a:avLst/>
@@ -14121,54 +14121,6 @@
         <p:spPr>
           <a:xfrm>
             <a:off x="6164580" y="1188720"/>
-            <a:ext cx="5570220" cy="2537460"/>
-          </a:xfrm>
-          <a:prstGeom prst="rect">
-            <a:avLst/>
-          </a:prstGeom>
-        </p:spPr>
-      </p:pic>
-      <p:pic>
-        <p:nvPicPr>
-          <p:cNvPr id="131" name="Picture 130" descr="image.png"/>
-          <p:cNvPicPr>
-            <a:picLocks noChangeAspect="1"/>
-          </p:cNvPicPr>
-          <p:nvPr/>
-        </p:nvPicPr>
-        <p:blipFill>
-          <a:blip r:embed="rId5"/>
-          <a:stretch>
-            <a:fillRect/>
-          </a:stretch>
-        </p:blipFill>
-        <p:spPr>
-          <a:xfrm>
-            <a:off x="457200" y="3863340"/>
-            <a:ext cx="5570220" cy="2537460"/>
-          </a:xfrm>
-          <a:prstGeom prst="rect">
-            <a:avLst/>
-          </a:prstGeom>
-        </p:spPr>
-      </p:pic>
-      <p:pic>
-        <p:nvPicPr>
-          <p:cNvPr id="132" name="Picture 131" descr="image.png"/>
-          <p:cNvPicPr>
-            <a:picLocks noChangeAspect="1"/>
-          </p:cNvPicPr>
-          <p:nvPr/>
-        </p:nvPicPr>
-        <p:blipFill>
-          <a:blip r:embed="rId6"/>
-          <a:stretch>
-            <a:fillRect/>
-          </a:stretch>
-        </p:blipFill>
-        <p:spPr>
-          <a:xfrm>
-            <a:off x="6164580" y="3863340"/>
             <a:ext cx="5570220" cy="2537460"/>
           </a:xfrm>
           <a:prstGeom prst="rect">
